--- a/PRESENTACION.pptx
+++ b/PRESENTACION.pptx
@@ -6623,7 +6623,7 @@
         <p:spPr>
           <a:xfrm>
             <a:off x="365760" y="1234440"/>
-            <a:ext cx="11430000" cy="4846320"/>
+            <a:ext cx="11430000" cy="4480560"/>
           </a:xfrm>
           <a:prstGeom prst="rect">
             <a:avLst/>
@@ -6632,18 +6632,57 @@
       </p:pic>
       <p:sp>
         <p:nvSpPr>
-          <p:cNvPr id="6" name="Shape 3"/>
-          <p:cNvSpPr/>
-          <p:nvPr/>
-        </p:nvSpPr>
-        <p:spPr>
-          <a:xfrm>
-            <a:off x="457200" y="6172200"/>
-            <a:ext cx="11247120" cy="548640"/>
+          <p:cNvPr id="6" name="Text 3"/>
+          <p:cNvSpPr/>
+          <p:nvPr/>
+        </p:nvSpPr>
+        <p:spPr>
+          <a:xfrm>
+            <a:off x="457200" y="5806440"/>
+            <a:ext cx="11247120" cy="365760"/>
+          </a:xfrm>
+          <a:prstGeom prst="rect">
+            <a:avLst/>
+          </a:prstGeom>
+          <a:noFill/>
+          <a:ln/>
+        </p:spPr>
+        <p:txBody>
+          <a:bodyPr wrap="square" rtlCol="0" anchor="ctr"/>
+          <a:lstStyle/>
+          <a:p>
+            <a:pPr algn="ctr" indent="0" marL="0">
+              <a:buNone/>
+            </a:pPr>
+            <a:r>
+              <a:rPr lang="en-US" sz="1100" i="1" dirty="0">
+                <a:solidFill>
+                  <a:srgbClr val="4A5568"/>
+                </a:solidFill>
+                <a:latin typeface="Calibri" pitchFamily="34" charset="0"/>
+                <a:ea typeface="Calibri" pitchFamily="34" charset="-122"/>
+                <a:cs typeface="Calibri" pitchFamily="34" charset="-120"/>
+              </a:rPr>
+              <a:t>Nota: precision/recall crudos, sin optimización de umbral por etiqueta — por eso los valores absolutos son inferiores al modelo mono-objetivo (slide 12).</a:t>
+            </a:r>
+            <a:endParaRPr lang="en-US" sz="1100" dirty="0"/>
+          </a:p>
+        </p:txBody>
+      </p:sp>
+      <p:sp>
+        <p:nvSpPr>
+          <p:cNvPr id="7" name="Shape 4"/>
+          <p:cNvSpPr/>
+          <p:nvPr/>
+        </p:nvSpPr>
+        <p:spPr>
+          <a:xfrm>
+            <a:off x="457200" y="6263640"/>
+            <a:ext cx="11247120" cy="457200"/>
           </a:xfrm>
           <a:prstGeom prst="roundRect">
             <a:avLst>
-              <a:gd name="adj" fmla="val 13333"/>
+              <a:gd name="adj" fmla="val 16000"/>
             </a:avLst>
           </a:prstGeom>
           <a:solidFill>
@@ -6659,14 +6698,14 @@
       </p:sp>
       <p:sp>
         <p:nvSpPr>
-          <p:cNvPr id="7" name="Text 4"/>
-          <p:cNvSpPr/>
-          <p:nvPr/>
-        </p:nvSpPr>
-        <p:spPr>
-          <a:xfrm>
-            <a:off x="640080" y="6172200"/>
-            <a:ext cx="10881360" cy="548640"/>
+          <p:cNvPr id="8" name="Text 5"/>
+          <p:cNvSpPr/>
+          <p:nvPr/>
+        </p:nvSpPr>
+        <p:spPr>
+          <a:xfrm>
+            <a:off x="640080" y="6263640"/>
+            <a:ext cx="10881360" cy="457200"/>
           </a:xfrm>
           <a:prstGeom prst="rect">
             <a:avLst/>
@@ -7161,7 +7200,7 @@
                 <a:ea typeface="Cambria" pitchFamily="34" charset="-122"/>
                 <a:cs typeface="Cambria" pitchFamily="34" charset="-120"/>
               </a:rPr>
-              <a:t>0.109</a:t>
+              <a:t>0.106</a:t>
             </a:r>
             <a:endParaRPr lang="en-US" sz="3800" dirty="0"/>
           </a:p>
@@ -7312,7 +7351,7 @@
                 <a:ea typeface="Cambria" pitchFamily="34" charset="-122"/>
                 <a:cs typeface="Cambria" pitchFamily="34" charset="-120"/>
               </a:rPr>
-              <a:t>0.125</a:t>
+              <a:t>0.111</a:t>
             </a:r>
             <a:endParaRPr lang="en-US" sz="3800" dirty="0"/>
           </a:p>
@@ -7463,7 +7502,7 @@
                 <a:ea typeface="Cambria" pitchFamily="34" charset="-122"/>
                 <a:cs typeface="Cambria" pitchFamily="34" charset="-120"/>
               </a:rPr>
-              <a:t>0.32</a:t>
+              <a:t>0.306</a:t>
             </a:r>
             <a:endParaRPr lang="en-US" sz="3800" dirty="0"/>
           </a:p>
@@ -7614,7 +7653,7 @@
                 <a:ea typeface="Cambria" pitchFamily="34" charset="-122"/>
                 <a:cs typeface="Cambria" pitchFamily="34" charset="-120"/>
               </a:rPr>
-              <a:t>7.5 min</a:t>
+              <a:t>7.15 min</a:t>
             </a:r>
             <a:endParaRPr lang="en-US" sz="3800" dirty="0"/>
           </a:p>
@@ -12586,7 +12625,7 @@
                 <a:ea typeface="Calibri" pitchFamily="34" charset="-122"/>
                 <a:cs typeface="Calibri" pitchFamily="34" charset="-120"/>
               </a:rPr>
-              <a:t>Cruce aritmético + mutación gaussiana</a:t>
+              <a:t>Cruce uniforme + mutación gaussiana (operadores para reales)</a:t>
             </a:r>
             <a:endParaRPr lang="en-US" sz="1500" dirty="0"/>
           </a:p>
@@ -13473,7 +13512,7 @@
                 <a:ea typeface="Calibri" pitchFamily="34" charset="-122"/>
                 <a:cs typeface="Calibri" pitchFamily="34" charset="-120"/>
               </a:rPr>
-              <a:t>Probabilidad por posición en el ranking. Presión selectiva constante.</a:t>
+              <a:t>Probabilidad por posición en el ranking. Presión selectiva constante, independiente de la escala del fitness.</a:t>
             </a:r>
             <a:endParaRPr lang="en-US" sz="1200" dirty="0"/>
           </a:p>
@@ -13814,7 +13853,7 @@
                 <a:ea typeface="Consolas" pitchFamily="34" charset="-122"/>
                 <a:cs typeface="Consolas" pitchFamily="34" charset="-120"/>
               </a:rPr>
-              <a:t>p_mutation = 0.05</a:t>
+              <a:t>p_mutation = 0.04</a:t>
             </a:r>
             <a:endParaRPr lang="en-US" sz="1200" dirty="0"/>
           </a:p>
@@ -14901,7 +14940,7 @@
                           <a:ea typeface="Calibri" pitchFamily="34" charset="-122"/>
                           <a:cs typeface="Calibri" pitchFamily="34" charset="-120"/>
                         </a:rPr>
-                        <a:t>0.132</a:t>
+                        <a:t>0.115</a:t>
                       </a:r>
                       <a:endParaRPr lang="en-US" sz="1300" dirty="0">
                         <a:latin typeface="Calibri" charset="0"/>
@@ -14966,7 +15005,7 @@
                           <a:ea typeface="Calibri" pitchFamily="34" charset="-122"/>
                           <a:cs typeface="Calibri" pitchFamily="34" charset="-120"/>
                         </a:rPr>
-                        <a:t>0.0998</a:t>
+                        <a:t>0.092</a:t>
                       </a:r>
                       <a:endParaRPr lang="en-US" sz="1300" dirty="0">
                         <a:latin typeface="Calibri" charset="0"/>
@@ -15031,7 +15070,7 @@
                           <a:ea typeface="Calibri" pitchFamily="34" charset="-122"/>
                           <a:cs typeface="Calibri" pitchFamily="34" charset="-120"/>
                         </a:rPr>
-                        <a:t>3 min</a:t>
+                        <a:t>2.8 min</a:t>
                       </a:r>
                       <a:endParaRPr lang="en-US" sz="1300" dirty="0">
                         <a:latin typeface="Calibri" charset="0"/>
@@ -15096,7 +15135,7 @@
                           <a:ea typeface="Calibri" pitchFamily="34" charset="-122"/>
                           <a:cs typeface="Calibri" pitchFamily="34" charset="-120"/>
                         </a:rPr>
-                        <a:t>0.0011/gen</a:t>
+                        <a:t>0.00096/gen</a:t>
                       </a:r>
                       <a:endParaRPr lang="en-US" sz="1300" dirty="0">
                         <a:latin typeface="Calibri" charset="0"/>
@@ -15231,7 +15270,7 @@
                           <a:ea typeface="Calibri" pitchFamily="34" charset="-122"/>
                           <a:cs typeface="Calibri" pitchFamily="34" charset="-120"/>
                         </a:rPr>
-                        <a:t>0.164</a:t>
+                        <a:t>0.138</a:t>
                       </a:r>
                       <a:endParaRPr lang="en-US" sz="1300" dirty="0">
                         <a:latin typeface="Calibri" charset="0"/>
@@ -15299,7 +15338,7 @@
                           <a:ea typeface="Calibri" pitchFamily="34" charset="-122"/>
                           <a:cs typeface="Calibri" pitchFamily="34" charset="-120"/>
                         </a:rPr>
-                        <a:t>0.1091</a:t>
+                        <a:t>0.106</a:t>
                       </a:r>
                       <a:endParaRPr lang="en-US" sz="1300" dirty="0">
                         <a:latin typeface="Calibri" charset="0"/>
@@ -15367,7 +15406,7 @@
                           <a:ea typeface="Calibri" pitchFamily="34" charset="-122"/>
                           <a:cs typeface="Calibri" pitchFamily="34" charset="-120"/>
                         </a:rPr>
-                        <a:t>7.5 min</a:t>
+                        <a:t>7.15 min</a:t>
                       </a:r>
                       <a:endParaRPr lang="en-US" sz="1300" dirty="0">
                         <a:latin typeface="Calibri" charset="0"/>
@@ -15435,7 +15474,7 @@
                           <a:ea typeface="Calibri" pitchFamily="34" charset="-122"/>
                           <a:cs typeface="Calibri" pitchFamily="34" charset="-120"/>
                         </a:rPr>
-                        <a:t>0.00018/gen</a:t>
+                        <a:t>0.00013/gen</a:t>
                       </a:r>
                       <a:endParaRPr lang="en-US" sz="1300" dirty="0">
                         <a:latin typeface="Calibri" charset="0"/>
@@ -15570,7 +15609,7 @@
                           <a:ea typeface="Calibri" pitchFamily="34" charset="-122"/>
                           <a:cs typeface="Calibri" pitchFamily="34" charset="-120"/>
                         </a:rPr>
-                        <a:t>0.166</a:t>
+                        <a:t>0.136</a:t>
                       </a:r>
                       <a:endParaRPr lang="en-US" sz="1300" dirty="0">
                         <a:latin typeface="Calibri" charset="0"/>
@@ -15635,7 +15674,7 @@
                           <a:ea typeface="Calibri" pitchFamily="34" charset="-122"/>
                           <a:cs typeface="Calibri" pitchFamily="34" charset="-120"/>
                         </a:rPr>
-                        <a:t>0.1089</a:t>
+                        <a:t>0.100</a:t>
                       </a:r>
                       <a:endParaRPr lang="en-US" sz="1300" dirty="0">
                         <a:latin typeface="Calibri" charset="0"/>
@@ -15700,7 +15739,7 @@
                           <a:ea typeface="Calibri" pitchFamily="34" charset="-122"/>
                           <a:cs typeface="Calibri" pitchFamily="34" charset="-120"/>
                         </a:rPr>
-                        <a:t>12.7 min</a:t>
+                        <a:t>11.5 min</a:t>
                       </a:r>
                       <a:endParaRPr lang="en-US" sz="1300" dirty="0">
                         <a:latin typeface="Calibri" charset="0"/>
@@ -15765,7 +15804,7 @@
                           <a:ea typeface="Calibri" pitchFamily="34" charset="-122"/>
                           <a:cs typeface="Calibri" pitchFamily="34" charset="-120"/>
                         </a:rPr>
-                        <a:t>0.00001/gen</a:t>
+                        <a:t>−0.00001/gen</a:t>
                       </a:r>
                       <a:endParaRPr lang="en-US" sz="1300" dirty="0">
                         <a:latin typeface="Calibri" charset="0"/>
@@ -15924,7 +15963,7 @@
                   <a:srgbClr val="1A202C"/>
                 </a:solidFill>
               </a:rPr>
-              <a:t>La tasa de mejora cae 110× entre el inicio y el final.</a:t>
+              <a:t>La tasa de mejora cae 7× entre 0→120 y 120→300 gens.</a:t>
             </a:r>
             <a:endParaRPr lang="en-US" sz="1300" dirty="0"/>
           </a:p>
@@ -15959,7 +15998,7 @@
                   <a:srgbClr val="1A202C"/>
                 </a:solidFill>
               </a:rPr>
-              <a:t>120 → 300 gen: +0.014 (mejora útil).</a:t>
+              <a:t>120 → 300 gen: mejora útil (F1 +0.014).</a:t>
             </a:r>
             <a:endParaRPr lang="en-US" sz="1300" dirty="0"/>
           </a:p>
@@ -15977,7 +16016,7 @@
                   <a:srgbClr val="1A202C"/>
                 </a:solidFill>
               </a:rPr>
-              <a:t>300 → 500 gen: solo +0.002 (casi cero).</a:t>
+              <a:t>300 → 500 gen: sin ganancia (tasa se vuelve negativa).</a:t>
             </a:r>
             <a:endParaRPr lang="en-US" sz="1300" dirty="0"/>
           </a:p>
@@ -16050,7 +16089,7 @@
                 <a:ea typeface="Calibri" pitchFamily="34" charset="-122"/>
                 <a:cs typeface="Calibri" pitchFamily="34" charset="-120"/>
               </a:rPr>
-              <a:t>⚠️ Hallazgo 2: overfitting al subset de fitness</a:t>
+              <a:t>⚠️ Hallazgo 2: 500 gen retrocede</a:t>
             </a:r>
             <a:endParaRPr lang="en-US" sz="1500" dirty="0"/>
           </a:p>
@@ -16090,7 +16129,7 @@
                   <a:srgbClr val="1A202C"/>
                 </a:solidFill>
               </a:rPr>
-              <a:t>En 500 gen, el fitness sigue subiendo (0.164 → 0.166)</a:t>
+              <a:t>En 500 gen, el fitness cae ligeramente (0.138 → 0.136)</a:t>
             </a:r>
             <a:endParaRPr lang="en-US" sz="1300" dirty="0"/>
           </a:p>
@@ -16107,7 +16146,7 @@
                   <a:srgbClr val="1A202C"/>
                 </a:solidFill>
               </a:rPr>
-              <a:t>pero el F1 de test BAJA (0.1091 → 0.1089).</a:t>
+              <a:t>y el F1 de test también baja (0.106 → 0.100).</a:t>
             </a:r>
             <a:endParaRPr lang="en-US" sz="1300" dirty="0"/>
           </a:p>
@@ -16141,7 +16180,7 @@
                   <a:srgbClr val="1A202C"/>
                 </a:solidFill>
               </a:rPr>
-              <a:t>El AG empieza a sobreajustarse al subset de fitness.</a:t>
+              <a:t>Explicación: el σ adaptativo se agota + inmigrantes al final introducen ruido que ya no rescata mejores individuos.</a:t>
             </a:r>
             <a:endParaRPr lang="en-US" sz="1300" dirty="0"/>
           </a:p>
@@ -16332,7 +16371,7 @@
         <p:spPr>
           <a:xfrm>
             <a:off x="365760" y="1188720"/>
-            <a:ext cx="7772400" cy="4937760"/>
+            <a:ext cx="7772400" cy="4480560"/>
           </a:xfrm>
           <a:prstGeom prst="rect">
             <a:avLst/>
@@ -17378,7 +17417,7 @@
                           <a:ea typeface="Calibri" pitchFamily="34" charset="-122"/>
                           <a:cs typeface="Calibri" pitchFamily="34" charset="-120"/>
                         </a:rPr>
-                        <a:t>★ AG COMPLETO</a:t>
+                        <a:t>AG COMPLETO (este proyecto)</a:t>
                       </a:r>
                       <a:endParaRPr lang="en-US" sz="1300" dirty="0">
                         <a:latin typeface="Calibri" charset="0"/>
@@ -17572,13 +17611,52 @@
       </p:graphicFrame>
       <p:sp>
         <p:nvSpPr>
-          <p:cNvPr id="7" name="Shape 3"/>
-          <p:cNvSpPr/>
-          <p:nvPr/>
-        </p:nvSpPr>
-        <p:spPr>
-          <a:xfrm>
-            <a:off x="457200" y="6263640"/>
+          <p:cNvPr id="7" name="Text 3"/>
+          <p:cNvSpPr/>
+          <p:nvPr/>
+        </p:nvSpPr>
+        <p:spPr>
+          <a:xfrm>
+            <a:off x="457200" y="5760720"/>
+            <a:ext cx="11247120" cy="457200"/>
+          </a:xfrm>
+          <a:prstGeom prst="rect">
+            <a:avLst/>
+          </a:prstGeom>
+          <a:noFill/>
+          <a:ln/>
+        </p:spPr>
+        <p:txBody>
+          <a:bodyPr wrap="square" rtlCol="0" anchor="ctr"/>
+          <a:lstStyle/>
+          <a:p>
+            <a:pPr algn="ctr" indent="0" marL="0">
+              <a:buNone/>
+            </a:pPr>
+            <a:r>
+              <a:rPr lang="en-US" sz="1100" i="1" dirty="0">
+                <a:solidFill>
+                  <a:srgbClr val="4A5568"/>
+                </a:solidFill>
+                <a:latin typeface="Calibri" pitchFamily="34" charset="0"/>
+                <a:ea typeface="Calibri" pitchFamily="34" charset="-122"/>
+                <a:cs typeface="Calibri" pitchFamily="34" charset="-120"/>
+              </a:rPr>
+              <a:t>Nota: en este ablation reducido (40 ind × 50 gen, sin inmigrantes), "sin elitismo" (0.075) supera al AG completo (0.065). En el run real (80 × 300 con inmigrantes) el elitismo sí aporta — el elitismo alto sobre población chica concentra demasiado.</a:t>
+            </a:r>
+            <a:endParaRPr lang="en-US" sz="1100" dirty="0"/>
+          </a:p>
+        </p:txBody>
+      </p:sp>
+      <p:sp>
+        <p:nvSpPr>
+          <p:cNvPr id="8" name="Shape 4"/>
+          <p:cNvSpPr/>
+          <p:nvPr/>
+        </p:nvSpPr>
+        <p:spPr>
+          <a:xfrm>
+            <a:off x="457200" y="6309360"/>
             <a:ext cx="11247120" cy="457200"/>
           </a:xfrm>
           <a:prstGeom prst="roundRect">
@@ -17599,13 +17677,13 @@
       </p:sp>
       <p:sp>
         <p:nvSpPr>
-          <p:cNvPr id="8" name="Text 4"/>
-          <p:cNvSpPr/>
-          <p:nvPr/>
-        </p:nvSpPr>
-        <p:spPr>
-          <a:xfrm>
-            <a:off x="640080" y="6263640"/>
+          <p:cNvPr id="9" name="Text 5"/>
+          <p:cNvSpPr/>
+          <p:nvPr/>
+        </p:nvSpPr>
+        <p:spPr>
+          <a:xfrm>
+            <a:off x="640080" y="6309360"/>
             <a:ext cx="10881360" cy="457200"/>
           </a:xfrm>
           <a:prstGeom prst="rect">
@@ -17630,7 +17708,7 @@
                 <a:ea typeface="Cambria" pitchFamily="34" charset="-122"/>
                 <a:cs typeface="Cambria" pitchFamily="34" charset="-120"/>
               </a:rPr>
-              <a:t>Random search → AG completo: F1 +27 %.  ·  Cada operador aporta.</a:t>
+              <a:t>Random search → AG completo: F1 +27 %.  ·  Cruce es el operador primario (Goldberg, Módulo 2).</a:t>
             </a:r>
             <a:endParaRPr lang="en-US" sz="1500" dirty="0"/>
           </a:p>
